--- a/Disertación-lechuga.pptx
+++ b/Disertación-lechuga.pptx
@@ -4804,7 +4804,7 @@
                 <a:latin typeface="Times New Roman" panose="02020603050405020304" pitchFamily="18" charset="0"/>
                 <a:cs typeface="Times New Roman" panose="02020603050405020304" pitchFamily="18" charset="0"/>
               </a:rPr>
-              <a:t>19</a:t>
+              <a:t>10</a:t>
             </a:r>
           </a:p>
         </p:txBody>
@@ -8438,7 +8438,7 @@
                 <a:cs typeface="Times New Roman"/>
                 <a:sym typeface="Times New Roman"/>
               </a:rPr>
-              <a:t>11</a:t>
+              <a:t>5</a:t>
             </a:r>
           </a:p>
         </p:txBody>
@@ -9569,7 +9569,7 @@
                 <a:cs typeface="Times New Roman"/>
                 <a:sym typeface="Times New Roman"/>
               </a:rPr>
-              <a:t>15</a:t>
+              <a:t>6</a:t>
             </a:r>
           </a:p>
         </p:txBody>
@@ -10319,7 +10319,7 @@
                 <a:cs typeface="Times New Roman"/>
                 <a:sym typeface="Times New Roman"/>
               </a:rPr>
-              <a:t>16</a:t>
+              <a:t>7</a:t>
             </a:r>
           </a:p>
         </p:txBody>
@@ -11885,7 +11885,7 @@
                 <a:cs typeface="Times New Roman"/>
                 <a:sym typeface="Times New Roman"/>
               </a:rPr>
-              <a:t>17</a:t>
+              <a:t>8</a:t>
             </a:r>
           </a:p>
         </p:txBody>
@@ -12205,7 +12205,7 @@
                 <a:cs typeface="Times New Roman"/>
                 <a:sym typeface="Times New Roman"/>
               </a:rPr>
-              <a:t>18</a:t>
+              <a:t>9</a:t>
             </a:r>
           </a:p>
         </p:txBody>
